--- a/slides/第07回_オペレーティングシステムとプロセス.pptx
+++ b/slides/第07回_オペレーティングシステムとプロセス.pptx
@@ -4076,7 +4076,7 @@
         <p:spPr>
           <a:xfrm>
             <a:off x="685800" y="1481328"/>
-            <a:ext cx="10789920" cy="621792"/>
+            <a:ext cx="10789920" cy="566928"/>
           </a:xfrm>
           <a:prstGeom prst="rect">
             <a:avLst/>
@@ -4125,8 +4125,8 @@
         </p:blipFill>
         <p:spPr>
           <a:xfrm>
-            <a:off x="2632641" y="2139696"/>
-            <a:ext cx="6896239" cy="3346704"/>
+            <a:off x="2576114" y="2084832"/>
+            <a:ext cx="7009292" cy="3401568"/>
           </a:xfrm>
           <a:prstGeom prst="rect">
             <a:avLst/>
@@ -4776,7 +4776,7 @@
         <p:spPr>
           <a:xfrm>
             <a:off x="685800" y="1481328"/>
-            <a:ext cx="10789920" cy="621792"/>
+            <a:ext cx="10789920" cy="566928"/>
           </a:xfrm>
           <a:prstGeom prst="rect">
             <a:avLst/>
@@ -4817,7 +4817,7 @@
         </p:nvSpPr>
         <p:spPr>
           <a:xfrm>
-            <a:off x="685800" y="2185416"/>
+            <a:off x="685800" y="2130552"/>
             <a:ext cx="10789920" cy="713232"/>
           </a:xfrm>
           <a:prstGeom prst="roundRect">
@@ -4844,7 +4844,7 @@
         </p:nvSpPr>
         <p:spPr>
           <a:xfrm>
-            <a:off x="914400" y="2340864"/>
+            <a:off x="914400" y="2286000"/>
             <a:ext cx="10332720" cy="402336"/>
           </a:xfrm>
           <a:prstGeom prst="rect">
@@ -4883,7 +4883,7 @@
         </p:nvSpPr>
         <p:spPr>
           <a:xfrm>
-            <a:off x="1188720" y="3145536"/>
+            <a:off x="1188720" y="3090672"/>
             <a:ext cx="4572000" cy="457200"/>
           </a:xfrm>
           <a:prstGeom prst="rect">
@@ -4922,7 +4922,7 @@
         </p:nvSpPr>
         <p:spPr>
           <a:xfrm>
-            <a:off x="5943600" y="3273552"/>
+            <a:off x="5943600" y="3218688"/>
             <a:ext cx="640080" cy="201168"/>
           </a:xfrm>
           <a:prstGeom prst="rightArrow">
@@ -4942,7 +4942,7 @@
         </p:nvSpPr>
         <p:spPr>
           <a:xfrm>
-            <a:off x="6766560" y="3145536"/>
+            <a:off x="6766560" y="3090672"/>
             <a:ext cx="4206240" cy="457200"/>
           </a:xfrm>
           <a:prstGeom prst="rect">
@@ -4981,7 +4981,7 @@
         </p:nvSpPr>
         <p:spPr>
           <a:xfrm>
-            <a:off x="1188720" y="3767328"/>
+            <a:off x="1188720" y="3712464"/>
             <a:ext cx="4572000" cy="457200"/>
           </a:xfrm>
           <a:prstGeom prst="rect">
@@ -5020,7 +5020,7 @@
         </p:nvSpPr>
         <p:spPr>
           <a:xfrm>
-            <a:off x="5943600" y="3895344"/>
+            <a:off x="5943600" y="3840480"/>
             <a:ext cx="640080" cy="201168"/>
           </a:xfrm>
           <a:prstGeom prst="rightArrow">
@@ -5040,7 +5040,7 @@
         </p:nvSpPr>
         <p:spPr>
           <a:xfrm>
-            <a:off x="6766560" y="3767328"/>
+            <a:off x="6766560" y="3712464"/>
             <a:ext cx="4206240" cy="457200"/>
           </a:xfrm>
           <a:prstGeom prst="rect">
@@ -5079,7 +5079,7 @@
         </p:nvSpPr>
         <p:spPr>
           <a:xfrm>
-            <a:off x="1188720" y="4389120"/>
+            <a:off x="1188720" y="4334256"/>
             <a:ext cx="4572000" cy="457200"/>
           </a:xfrm>
           <a:prstGeom prst="rect">
@@ -5118,7 +5118,7 @@
         </p:nvSpPr>
         <p:spPr>
           <a:xfrm>
-            <a:off x="5943600" y="4517136"/>
+            <a:off x="5943600" y="4462272"/>
             <a:ext cx="640080" cy="201168"/>
           </a:xfrm>
           <a:prstGeom prst="rightArrow">
@@ -5138,7 +5138,7 @@
         </p:nvSpPr>
         <p:spPr>
           <a:xfrm>
-            <a:off x="6766560" y="4389120"/>
+            <a:off x="6766560" y="4334256"/>
             <a:ext cx="4206240" cy="457200"/>
           </a:xfrm>
           <a:prstGeom prst="rect">
@@ -5369,7 +5369,7 @@
         <p:spPr>
           <a:xfrm>
             <a:off x="685800" y="1481328"/>
-            <a:ext cx="10789920" cy="621792"/>
+            <a:ext cx="10789920" cy="365760"/>
           </a:xfrm>
           <a:prstGeom prst="rect">
             <a:avLst/>
@@ -5418,8 +5418,8 @@
         </p:blipFill>
         <p:spPr>
           <a:xfrm>
-            <a:off x="3291840" y="2139696"/>
-            <a:ext cx="5577840" cy="3346704"/>
+            <a:off x="3078480" y="1883664"/>
+            <a:ext cx="6004560" cy="3602736"/>
           </a:xfrm>
           <a:prstGeom prst="rect">
             <a:avLst/>
@@ -5623,7 +5623,7 @@
         <p:spPr>
           <a:xfrm>
             <a:off x="685800" y="1481328"/>
-            <a:ext cx="10789920" cy="621792"/>
+            <a:ext cx="10789920" cy="365760"/>
           </a:xfrm>
           <a:prstGeom prst="rect">
             <a:avLst/>
@@ -5664,7 +5664,7 @@
         </p:nvSpPr>
         <p:spPr>
           <a:xfrm>
-            <a:off x="685800" y="2139696"/>
+            <a:off x="685800" y="1883664"/>
             <a:ext cx="2526030" cy="1463040"/>
           </a:xfrm>
           <a:prstGeom prst="roundRect">
@@ -5691,7 +5691,7 @@
         </p:nvSpPr>
         <p:spPr>
           <a:xfrm>
-            <a:off x="868680" y="2276856"/>
+            <a:off x="868680" y="2020824"/>
             <a:ext cx="2160270" cy="310896"/>
           </a:xfrm>
           <a:prstGeom prst="rect">
@@ -5730,7 +5730,7 @@
         </p:nvSpPr>
         <p:spPr>
           <a:xfrm>
-            <a:off x="868680" y="2624328"/>
+            <a:off x="868680" y="2368296"/>
             <a:ext cx="2160270" cy="822960"/>
           </a:xfrm>
           <a:prstGeom prst="rect">
@@ -5772,7 +5772,7 @@
         </p:nvSpPr>
         <p:spPr>
           <a:xfrm>
-            <a:off x="3440430" y="2139696"/>
+            <a:off x="3440430" y="1883664"/>
             <a:ext cx="2526030" cy="1463040"/>
           </a:xfrm>
           <a:prstGeom prst="roundRect">
@@ -5799,7 +5799,7 @@
         </p:nvSpPr>
         <p:spPr>
           <a:xfrm>
-            <a:off x="3623310" y="2276856"/>
+            <a:off x="3623310" y="2020824"/>
             <a:ext cx="2160270" cy="310896"/>
           </a:xfrm>
           <a:prstGeom prst="rect">
@@ -5838,7 +5838,7 @@
         </p:nvSpPr>
         <p:spPr>
           <a:xfrm>
-            <a:off x="3623310" y="2624328"/>
+            <a:off x="3623310" y="2368296"/>
             <a:ext cx="2160270" cy="822960"/>
           </a:xfrm>
           <a:prstGeom prst="rect">
@@ -5880,7 +5880,7 @@
         </p:nvSpPr>
         <p:spPr>
           <a:xfrm>
-            <a:off x="6195060" y="2139696"/>
+            <a:off x="6195060" y="1883664"/>
             <a:ext cx="2526030" cy="1463040"/>
           </a:xfrm>
           <a:prstGeom prst="roundRect">
@@ -5907,7 +5907,7 @@
         </p:nvSpPr>
         <p:spPr>
           <a:xfrm>
-            <a:off x="6377940" y="2276856"/>
+            <a:off x="6377940" y="2020824"/>
             <a:ext cx="2160270" cy="310896"/>
           </a:xfrm>
           <a:prstGeom prst="rect">
@@ -5946,7 +5946,7 @@
         </p:nvSpPr>
         <p:spPr>
           <a:xfrm>
-            <a:off x="6377940" y="2624328"/>
+            <a:off x="6377940" y="2368296"/>
             <a:ext cx="2160270" cy="822960"/>
           </a:xfrm>
           <a:prstGeom prst="rect">
@@ -5988,7 +5988,7 @@
         </p:nvSpPr>
         <p:spPr>
           <a:xfrm>
-            <a:off x="8949690" y="2139696"/>
+            <a:off x="8949690" y="1883664"/>
             <a:ext cx="2526030" cy="1463040"/>
           </a:xfrm>
           <a:prstGeom prst="roundRect">
@@ -6015,7 +6015,7 @@
         </p:nvSpPr>
         <p:spPr>
           <a:xfrm>
-            <a:off x="9132570" y="2276856"/>
+            <a:off x="9132570" y="2020824"/>
             <a:ext cx="2160270" cy="310896"/>
           </a:xfrm>
           <a:prstGeom prst="rect">
@@ -6054,7 +6054,7 @@
         </p:nvSpPr>
         <p:spPr>
           <a:xfrm>
-            <a:off x="9132570" y="2624328"/>
+            <a:off x="9132570" y="2368296"/>
             <a:ext cx="2160270" cy="822960"/>
           </a:xfrm>
           <a:prstGeom prst="rect">
@@ -6096,7 +6096,7 @@
         </p:nvSpPr>
         <p:spPr>
           <a:xfrm>
-            <a:off x="685800" y="3895344"/>
+            <a:off x="685800" y="3639312"/>
             <a:ext cx="10789920" cy="786384"/>
           </a:xfrm>
           <a:prstGeom prst="roundRect">
@@ -6123,7 +6123,7 @@
         </p:nvSpPr>
         <p:spPr>
           <a:xfrm>
-            <a:off x="914400" y="4023360"/>
+            <a:off x="914400" y="3767328"/>
             <a:ext cx="10332720" cy="292608"/>
           </a:xfrm>
           <a:prstGeom prst="rect">
@@ -6162,7 +6162,7 @@
         </p:nvSpPr>
         <p:spPr>
           <a:xfrm>
-            <a:off x="914400" y="4334256"/>
+            <a:off x="914400" y="4078224"/>
             <a:ext cx="10332720" cy="292608"/>
           </a:xfrm>
           <a:prstGeom prst="rect">
@@ -7308,45 +7308,6 @@
       <p:sp>
         <p:nvSpPr>
           <p:cNvPr id="6" name="Text 3"/>
-          <p:cNvSpPr/>
-          <p:nvPr/>
-        </p:nvSpPr>
-        <p:spPr>
-          <a:xfrm>
-            <a:off x="685800" y="5687568"/>
-            <a:ext cx="10789920" cy="365760"/>
-          </a:xfrm>
-          <a:prstGeom prst="rect">
-            <a:avLst/>
-          </a:prstGeom>
-          <a:noFill/>
-          <a:ln/>
-        </p:spPr>
-        <p:txBody>
-          <a:bodyPr wrap="square" lIns="0" tIns="0" rIns="0" bIns="0" rtlCol="0" anchor="ctr"/>
-          <a:lstStyle/>
-          <a:p>
-            <a:pPr algn="ctr" indent="0" marL="0">
-              <a:buNone/>
-            </a:pPr>
-            <a:r>
-              <a:rPr lang="en-US" sz="1500" dirty="0">
-                <a:solidFill>
-                  <a:srgbClr val="16191D"/>
-                </a:solidFill>
-                <a:latin typeface="Yu Gothic" pitchFamily="34" charset="0"/>
-                <a:ea typeface="Yu Gothic" pitchFamily="34" charset="-122"/>
-                <a:cs typeface="Yu Gothic" pitchFamily="34" charset="-120"/>
-              </a:rPr>
-              <a:t>スタックだけが別。ヒープ・データ・テキストは共有する。</a:t>
-            </a:r>
-            <a:endParaRPr lang="en-US" sz="1500" dirty="0"/>
-          </a:p>
-        </p:txBody>
-      </p:sp>
-      <p:sp>
-        <p:nvSpPr>
-          <p:cNvPr id="7" name="Text 4"/>
           <p:cNvSpPr/>
           <p:nvPr/>
         </p:nvSpPr>
@@ -8944,7 +8905,7 @@
         <p:spPr>
           <a:xfrm>
             <a:off x="685800" y="1481328"/>
-            <a:ext cx="10789920" cy="621792"/>
+            <a:ext cx="10789920" cy="566928"/>
           </a:xfrm>
           <a:prstGeom prst="rect">
             <a:avLst/>
@@ -8985,7 +8946,7 @@
         </p:nvSpPr>
         <p:spPr>
           <a:xfrm>
-            <a:off x="685800" y="2139696"/>
+            <a:off x="685800" y="2084832"/>
             <a:ext cx="3444240" cy="1554480"/>
           </a:xfrm>
           <a:prstGeom prst="roundRect">
@@ -9012,7 +8973,7 @@
         </p:nvSpPr>
         <p:spPr>
           <a:xfrm>
-            <a:off x="868680" y="2276856"/>
+            <a:off x="868680" y="2221992"/>
             <a:ext cx="3078480" cy="310896"/>
           </a:xfrm>
           <a:prstGeom prst="rect">
@@ -9051,7 +9012,7 @@
         </p:nvSpPr>
         <p:spPr>
           <a:xfrm>
-            <a:off x="868680" y="2624328"/>
+            <a:off x="868680" y="2569464"/>
             <a:ext cx="3078480" cy="914400"/>
           </a:xfrm>
           <a:prstGeom prst="rect">
@@ -9093,7 +9054,7 @@
         </p:nvSpPr>
         <p:spPr>
           <a:xfrm>
-            <a:off x="4358640" y="2139696"/>
+            <a:off x="4358640" y="2084832"/>
             <a:ext cx="3444240" cy="1554480"/>
           </a:xfrm>
           <a:prstGeom prst="roundRect">
@@ -9120,7 +9081,7 @@
         </p:nvSpPr>
         <p:spPr>
           <a:xfrm>
-            <a:off x="4541520" y="2276856"/>
+            <a:off x="4541520" y="2221992"/>
             <a:ext cx="3078480" cy="310896"/>
           </a:xfrm>
           <a:prstGeom prst="rect">
@@ -9159,7 +9120,7 @@
         </p:nvSpPr>
         <p:spPr>
           <a:xfrm>
-            <a:off x="4541520" y="2624328"/>
+            <a:off x="4541520" y="2569464"/>
             <a:ext cx="3078480" cy="914400"/>
           </a:xfrm>
           <a:prstGeom prst="rect">
@@ -9201,7 +9162,7 @@
         </p:nvSpPr>
         <p:spPr>
           <a:xfrm>
-            <a:off x="8031480" y="2139696"/>
+            <a:off x="8031480" y="2084832"/>
             <a:ext cx="3444240" cy="1554480"/>
           </a:xfrm>
           <a:prstGeom prst="roundRect">
@@ -9228,7 +9189,7 @@
         </p:nvSpPr>
         <p:spPr>
           <a:xfrm>
-            <a:off x="8214360" y="2276856"/>
+            <a:off x="8214360" y="2221992"/>
             <a:ext cx="3078480" cy="310896"/>
           </a:xfrm>
           <a:prstGeom prst="rect">
@@ -9267,7 +9228,7 @@
         </p:nvSpPr>
         <p:spPr>
           <a:xfrm>
-            <a:off x="8214360" y="2624328"/>
+            <a:off x="8214360" y="2569464"/>
             <a:ext cx="3078480" cy="914400"/>
           </a:xfrm>
           <a:prstGeom prst="rect">
@@ -11318,7 +11279,7 @@
         <p:spPr>
           <a:xfrm>
             <a:off x="685800" y="1481328"/>
-            <a:ext cx="10789920" cy="621792"/>
+            <a:ext cx="10789920" cy="365760"/>
           </a:xfrm>
           <a:prstGeom prst="rect">
             <a:avLst/>
@@ -11367,8 +11328,8 @@
         </p:blipFill>
         <p:spPr>
           <a:xfrm>
-            <a:off x="2734056" y="2139696"/>
-            <a:ext cx="6693408" cy="3346704"/>
+            <a:off x="2478024" y="1883664"/>
+            <a:ext cx="7205472" cy="3602736"/>
           </a:xfrm>
           <a:prstGeom prst="rect">
             <a:avLst/>
@@ -11634,7 +11595,7 @@
         <p:spPr>
           <a:xfrm>
             <a:off x="685800" y="1481328"/>
-            <a:ext cx="10789920" cy="621792"/>
+            <a:ext cx="10789920" cy="365760"/>
           </a:xfrm>
           <a:prstGeom prst="rect">
             <a:avLst/>
@@ -11675,7 +11636,7 @@
         </p:nvSpPr>
         <p:spPr>
           <a:xfrm>
-            <a:off x="685800" y="2139696"/>
+            <a:off x="685800" y="1883664"/>
             <a:ext cx="5280660" cy="1188720"/>
           </a:xfrm>
           <a:prstGeom prst="roundRect">
@@ -11702,7 +11663,7 @@
         </p:nvSpPr>
         <p:spPr>
           <a:xfrm>
-            <a:off x="868680" y="2276856"/>
+            <a:off x="868680" y="2020824"/>
             <a:ext cx="4914900" cy="310896"/>
           </a:xfrm>
           <a:prstGeom prst="rect">
@@ -11741,7 +11702,7 @@
         </p:nvSpPr>
         <p:spPr>
           <a:xfrm>
-            <a:off x="868680" y="2624328"/>
+            <a:off x="868680" y="2368296"/>
             <a:ext cx="4914900" cy="548640"/>
           </a:xfrm>
           <a:prstGeom prst="rect">
@@ -11783,7 +11744,7 @@
         </p:nvSpPr>
         <p:spPr>
           <a:xfrm>
-            <a:off x="6195060" y="2139696"/>
+            <a:off x="6195060" y="1883664"/>
             <a:ext cx="5280660" cy="1188720"/>
           </a:xfrm>
           <a:prstGeom prst="roundRect">
@@ -11810,7 +11771,7 @@
         </p:nvSpPr>
         <p:spPr>
           <a:xfrm>
-            <a:off x="6377940" y="2276856"/>
+            <a:off x="6377940" y="2020824"/>
             <a:ext cx="4914900" cy="310896"/>
           </a:xfrm>
           <a:prstGeom prst="rect">
@@ -11849,7 +11810,7 @@
         </p:nvSpPr>
         <p:spPr>
           <a:xfrm>
-            <a:off x="6377940" y="2624328"/>
+            <a:off x="6377940" y="2368296"/>
             <a:ext cx="4914900" cy="548640"/>
           </a:xfrm>
           <a:prstGeom prst="rect">
@@ -11891,7 +11852,7 @@
         </p:nvSpPr>
         <p:spPr>
           <a:xfrm>
-            <a:off x="685800" y="3529584"/>
+            <a:off x="685800" y="3273552"/>
             <a:ext cx="5280660" cy="1188720"/>
           </a:xfrm>
           <a:prstGeom prst="roundRect">
@@ -11918,7 +11879,7 @@
         </p:nvSpPr>
         <p:spPr>
           <a:xfrm>
-            <a:off x="868680" y="3666744"/>
+            <a:off x="868680" y="3410712"/>
             <a:ext cx="4914900" cy="310896"/>
           </a:xfrm>
           <a:prstGeom prst="rect">
@@ -11957,7 +11918,7 @@
         </p:nvSpPr>
         <p:spPr>
           <a:xfrm>
-            <a:off x="868680" y="4014216"/>
+            <a:off x="868680" y="3758184"/>
             <a:ext cx="4914900" cy="548640"/>
           </a:xfrm>
           <a:prstGeom prst="rect">
@@ -11999,7 +11960,7 @@
         </p:nvSpPr>
         <p:spPr>
           <a:xfrm>
-            <a:off x="6195060" y="3529584"/>
+            <a:off x="6195060" y="3273552"/>
             <a:ext cx="5280660" cy="1188720"/>
           </a:xfrm>
           <a:prstGeom prst="roundRect">
@@ -12026,7 +11987,7 @@
         </p:nvSpPr>
         <p:spPr>
           <a:xfrm>
-            <a:off x="6377940" y="3666744"/>
+            <a:off x="6377940" y="3410712"/>
             <a:ext cx="4914900" cy="310896"/>
           </a:xfrm>
           <a:prstGeom prst="rect">
@@ -12065,7 +12026,7 @@
         </p:nvSpPr>
         <p:spPr>
           <a:xfrm>
-            <a:off x="6377940" y="4014216"/>
+            <a:off x="6377940" y="3758184"/>
             <a:ext cx="4914900" cy="548640"/>
           </a:xfrm>
           <a:prstGeom prst="rect">
@@ -16717,7 +16678,7 @@
         <p:spPr>
           <a:xfrm>
             <a:off x="685800" y="1481328"/>
-            <a:ext cx="10789920" cy="621792"/>
+            <a:ext cx="10789920" cy="365760"/>
           </a:xfrm>
           <a:prstGeom prst="rect">
             <a:avLst/>
@@ -16765,7 +16726,7 @@
           </p:nvPr>
         </p:nvGraphicFramePr>
         <p:xfrm>
-          <a:off x="685800" y="2139696"/>
+          <a:off x="685800" y="1883664"/>
           <a:ext cx="10789920" cy="914400"/>
         </p:xfrm>
         <a:graphic>
@@ -17478,7 +17439,7 @@
         </p:nvSpPr>
         <p:spPr>
           <a:xfrm>
-            <a:off x="685800" y="4379976"/>
+            <a:off x="685800" y="4123944"/>
             <a:ext cx="10789920" cy="658368"/>
           </a:xfrm>
           <a:prstGeom prst="roundRect">
@@ -17505,7 +17466,7 @@
         </p:nvSpPr>
         <p:spPr>
           <a:xfrm>
-            <a:off x="914400" y="4526280"/>
+            <a:off x="914400" y="4270248"/>
             <a:ext cx="10332720" cy="365760"/>
           </a:xfrm>
           <a:prstGeom prst="rect">
@@ -17544,7 +17505,7 @@
         </p:nvSpPr>
         <p:spPr>
           <a:xfrm>
-            <a:off x="685800" y="5202936"/>
+            <a:off x="685800" y="4946904"/>
             <a:ext cx="10789920" cy="457200"/>
           </a:xfrm>
           <a:prstGeom prst="rect">
@@ -18866,7 +18827,7 @@
         <p:spPr>
           <a:xfrm>
             <a:off x="685800" y="1481328"/>
-            <a:ext cx="10789920" cy="621792"/>
+            <a:ext cx="10789920" cy="566928"/>
           </a:xfrm>
           <a:prstGeom prst="rect">
             <a:avLst/>
@@ -18915,53 +18876,14 @@
         </p:blipFill>
         <p:spPr>
           <a:xfrm>
-            <a:off x="3305444" y="2139696"/>
-            <a:ext cx="5550631" cy="3346704"/>
+            <a:off x="3259948" y="2084832"/>
+            <a:ext cx="5641625" cy="3401568"/>
           </a:xfrm>
           <a:prstGeom prst="rect">
             <a:avLst/>
           </a:prstGeom>
         </p:spPr>
       </p:pic>
-      <p:sp>
-        <p:nvSpPr>
-          <p:cNvPr id="7" name="Text 4"/>
-          <p:cNvSpPr/>
-          <p:nvPr/>
-        </p:nvSpPr>
-        <p:spPr>
-          <a:xfrm>
-            <a:off x="685800" y="5687568"/>
-            <a:ext cx="10789920" cy="365760"/>
-          </a:xfrm>
-          <a:prstGeom prst="rect">
-            <a:avLst/>
-          </a:prstGeom>
-          <a:noFill/>
-          <a:ln/>
-        </p:spPr>
-        <p:txBody>
-          <a:bodyPr wrap="square" lIns="0" tIns="0" rIns="0" bIns="0" rtlCol="0" anchor="ctr"/>
-          <a:lstStyle/>
-          <a:p>
-            <a:pPr algn="ctr" indent="0" marL="0">
-              <a:buNone/>
-            </a:pPr>
-            <a:r>
-              <a:rPr lang="en-US" sz="1500" dirty="0">
-                <a:solidFill>
-                  <a:srgbClr val="16191D"/>
-                </a:solidFill>
-                <a:latin typeface="Yu Gothic" pitchFamily="34" charset="0"/>
-                <a:ea typeface="Yu Gothic" pitchFamily="34" charset="-122"/>
-                <a:cs typeface="Yu Gothic" pitchFamily="34" charset="-120"/>
-              </a:rPr>
-              <a:t>入口が1つしかなく、そこで必ず検査される。この構造がシステム全体の安全性を支えている。</a:t>
-            </a:r>
-            <a:endParaRPr lang="en-US" sz="1500" dirty="0"/>
-          </a:p>
-        </p:txBody>
-      </p:sp>
     </p:spTree>
   </p:cSld>
   <p:clrMapOvr>

--- a/slides/第07回_オペレーティングシステムとプロセス.pptx
+++ b/slides/第07回_オペレーティングシステムとプロセス.pptx
@@ -7342,26 +7342,6 @@
                 <a:cs typeface="Yu Gothic" pitchFamily="34" charset="-120"/>
               </a:rPr>
               <a:t>生成も切替も軽い（ページテーブルの切替が要らない）。ただし一方が異常終了するとプロセスごと落ちる。</a:t>
-            </a:r>
-            <a:endParaRPr lang="en-US" sz="1300" dirty="0"/>
-          </a:p>
-          <a:p>
-            <a:pPr algn="ctr" indent="0" marL="0">
-              <a:lnSpc>
-                <a:spcPts val="2000"/>
-              </a:lnSpc>
-              <a:buNone/>
-            </a:pPr>
-            <a:r>
-              <a:rPr lang="en-US" sz="1300" dirty="0">
-                <a:solidFill>
-                  <a:srgbClr val="5F6672"/>
-                </a:solidFill>
-                <a:latin typeface="Yu Gothic" pitchFamily="34" charset="0"/>
-                <a:ea typeface="Yu Gothic" pitchFamily="34" charset="-122"/>
-                <a:cs typeface="Yu Gothic" pitchFamily="34" charset="-120"/>
-              </a:rPr>
-              <a:t>そして「そのまま共有できる」ことは、利点であり最大の危険でもある。</a:t>
             </a:r>
             <a:endParaRPr lang="en-US" sz="1300" dirty="0"/>
           </a:p>

--- a/slides/第07回_オペレーティングシステムとプロセス.pptx
+++ b/slides/第07回_オペレーティングシステムとプロセス.pptx
@@ -14009,7 +14009,7 @@
                 <a:ea typeface="Courier New" pitchFamily="34" charset="-122"/>
                 <a:cs typeface="Courier New" pitchFamily="34" charset="-120"/>
               </a:rPr>
-              <a:t>7-2</a:t>
+              <a:t>7-5</a:t>
             </a:r>
             <a:endParaRPr lang="en-US" sz="1300" dirty="0"/>
           </a:p>
@@ -14117,7 +14117,7 @@
                 <a:ea typeface="Courier New" pitchFamily="34" charset="-122"/>
                 <a:cs typeface="Courier New" pitchFamily="34" charset="-120"/>
               </a:rPr>
-              <a:t>7-3</a:t>
+              <a:t>7-7</a:t>
             </a:r>
             <a:endParaRPr lang="en-US" sz="1300" dirty="0"/>
           </a:p>
@@ -14159,7 +14159,7 @@
                 <a:ea typeface="Yu Gothic" pitchFamily="34" charset="-122"/>
                 <a:cs typeface="Yu Gothic" pitchFamily="34" charset="-120"/>
               </a:rPr>
-              <a:t>共有変数 count（初期値 10）を2つのスレッドがそれぞれ5回インクリメントする。排他制御がない場合、最終値の取りうる範囲と、最小値になる実行順序の例を示せ。</a:t>
+              <a:t>count（初期値10）を2スレッドが各5回インクリメントする。排他制御なし。(a) すべて反映されれば最終値は？ (b) 2つが同じ値を読んで書き戻すと count はいくつ増えるか。(c) それが5回とも起きたら最終値は？</a:t>
             </a:r>
             <a:endParaRPr lang="en-US" sz="1400" dirty="0"/>
           </a:p>
@@ -14225,7 +14225,7 @@
                 <a:ea typeface="Courier New" pitchFamily="34" charset="-122"/>
                 <a:cs typeface="Courier New" pitchFamily="34" charset="-120"/>
               </a:rPr>
-              <a:t>7-4</a:t>
+              <a:t>7-8</a:t>
             </a:r>
             <a:endParaRPr lang="en-US" sz="1300" dirty="0"/>
           </a:p>
